--- a/textbook/ppt/chapter06_ppt.pptx
+++ b/textbook/ppt/chapter06_ppt.pptx
@@ -7,6 +7,12 @@
   <p:sldIdLst>
     <p:sldId id="256" r:id="rId7"/>
     <p:sldId id="257" r:id="rId8"/>
+    <p:sldId id="258" r:id="rId9"/>
+    <p:sldId id="259" r:id="rId10"/>
+    <p:sldId id="260" r:id="rId11"/>
+    <p:sldId id="261" r:id="rId12"/>
+    <p:sldId id="262" r:id="rId13"/>
+    <p:sldId id="263" r:id="rId14"/>
   </p:sldIdLst>
   <p:sldSz cx="12188952" cy="6858000" type="screen4x3"/>
   <p:notesSz cx="6858000" cy="9144000"/>
@@ -3229,6 +3235,632 @@
             <a:r>
               <a:rPr sz="1800"/>
               <a:t>• ASCII码操作的基本概念与应用</a:t>
+            </a:r>
+          </a:p>
+        </p:txBody>
+      </p:sp>
+    </p:spTree>
+  </p:cSld>
+  <p:clrMapOvr>
+    <a:masterClrMapping/>
+  </p:clrMapOvr>
+</p:sld>
+</file>
+
+<file path=ppt/slides/slide3.xml><?xml version="1.0" encoding="utf-8"?>
+<p:sld xmlns:a="http://schemas.openxmlformats.org/drawingml/2006/main" xmlns:p="http://schemas.openxmlformats.org/presentationml/2006/main" xmlns:r="http://schemas.openxmlformats.org/officeDocument/2006/relationships">
+  <p:cSld>
+    <p:spTree>
+      <p:nvGrpSpPr>
+        <p:cNvPr id="1" name=""/>
+        <p:cNvGrpSpPr/>
+        <p:nvPr/>
+      </p:nvGrpSpPr>
+      <p:grpSpPr/>
+      <p:sp>
+        <p:nvSpPr>
+          <p:cNvPr id="2" name="TextBox 1"/>
+          <p:cNvSpPr txBox="1"/>
+          <p:nvPr/>
+        </p:nvSpPr>
+        <p:spPr>
+          <a:xfrm>
+            <a:off x="914400" y="457200"/>
+            <a:ext cx="10058400" cy="914400"/>
+          </a:xfrm>
+          <a:prstGeom prst="rect">
+            <a:avLst/>
+          </a:prstGeom>
+          <a:noFill/>
+        </p:spPr>
+        <p:txBody>
+          <a:bodyPr wrap="none">
+            <a:spAutoFit/>
+          </a:bodyPr>
+          <a:lstStyle/>
+          <a:p>
+            <a:r>
+              <a:rPr sz="2800" b="1">
+                <a:solidFill>
+                  <a:srgbClr val="8B0000"/>
+                </a:solidFill>
+              </a:rPr>
+              <a:t>本章概览</a:t>
+            </a:r>
+          </a:p>
+        </p:txBody>
+      </p:sp>
+      <p:sp>
+        <p:nvSpPr>
+          <p:cNvPr id="3" name="TextBox 2"/>
+          <p:cNvSpPr txBox="1"/>
+          <p:nvPr/>
+        </p:nvSpPr>
+        <p:spPr>
+          <a:xfrm>
+            <a:off x="914400" y="1371600"/>
+            <a:ext cx="10058400" cy="5029200"/>
+          </a:xfrm>
+          <a:prstGeom prst="rect">
+            <a:avLst/>
+          </a:prstGeom>
+          <a:noFill/>
+        </p:spPr>
+        <p:txBody>
+          <a:bodyPr wrap="none">
+            <a:spAutoFit/>
+          </a:bodyPr>
+          <a:lstStyle/>
+          <a:p/>
+          <a:p>
+            <a:r>
+              <a:rPr sz="1600">
+                <a:solidFill>
+                  <a:srgbClr val="000000"/>
+                </a:solidFill>
+              </a:rPr>
+              <a:t>字符串 = 字符数组（C++）/ 不可变对象（Python）</a:t>
+            </a:r>
+          </a:p>
+          <a:p>
+            <a:r>
+              <a:rPr sz="1600">
+                <a:solidFill>
+                  <a:srgbClr val="000000"/>
+                </a:solidFill>
+              </a:rPr>
+              <a:t>遍历：for(char c : s) 或 for c in s</a:t>
+            </a:r>
+          </a:p>
+          <a:p>
+            <a:r>
+              <a:rPr sz="1600">
+                <a:solidFill>
+                  <a:srgbClr val="000000"/>
+                </a:solidFill>
+              </a:rPr>
+              <a:t>查找替换：find/replace（C++）, in/replace（Python）</a:t>
+            </a:r>
+          </a:p>
+          <a:p>
+            <a:r>
+              <a:rPr sz="1600">
+                <a:solidFill>
+                  <a:srgbClr val="000000"/>
+                </a:solidFill>
+              </a:rPr>
+              <a:t>分割拼接：split/join</a:t>
+            </a:r>
+          </a:p>
+        </p:txBody>
+      </p:sp>
+    </p:spTree>
+  </p:cSld>
+  <p:clrMapOvr>
+    <a:masterClrMapping/>
+  </p:clrMapOvr>
+</p:sld>
+</file>
+
+<file path=ppt/slides/slide4.xml><?xml version="1.0" encoding="utf-8"?>
+<p:sld xmlns:a="http://schemas.openxmlformats.org/drawingml/2006/main" xmlns:p="http://schemas.openxmlformats.org/presentationml/2006/main" xmlns:r="http://schemas.openxmlformats.org/officeDocument/2006/relationships">
+  <p:cSld>
+    <p:spTree>
+      <p:nvGrpSpPr>
+        <p:cNvPr id="1" name=""/>
+        <p:cNvGrpSpPr/>
+        <p:nvPr/>
+      </p:nvGrpSpPr>
+      <p:grpSpPr/>
+      <p:sp>
+        <p:nvSpPr>
+          <p:cNvPr id="2" name="TextBox 1"/>
+          <p:cNvSpPr txBox="1"/>
+          <p:nvPr/>
+        </p:nvSpPr>
+        <p:spPr>
+          <a:xfrm>
+            <a:off x="914400" y="457200"/>
+            <a:ext cx="10058400" cy="914400"/>
+          </a:xfrm>
+          <a:prstGeom prst="rect">
+            <a:avLst/>
+          </a:prstGeom>
+          <a:noFill/>
+        </p:spPr>
+        <p:txBody>
+          <a:bodyPr wrap="none">
+            <a:spAutoFit/>
+          </a:bodyPr>
+          <a:lstStyle/>
+          <a:p>
+            <a:r>
+              <a:rPr sz="2800" b="1">
+                <a:solidFill>
+                  <a:srgbClr val="8B0000"/>
+                </a:solidFill>
+              </a:rPr>
+              <a:t>C++ 代码示例</a:t>
+            </a:r>
+          </a:p>
+        </p:txBody>
+      </p:sp>
+      <p:sp>
+        <p:nvSpPr>
+          <p:cNvPr id="3" name="TextBox 2"/>
+          <p:cNvSpPr txBox="1"/>
+          <p:nvPr/>
+        </p:nvSpPr>
+        <p:spPr>
+          <a:xfrm>
+            <a:off x="914400" y="1371600"/>
+            <a:ext cx="10058400" cy="5029200"/>
+          </a:xfrm>
+          <a:prstGeom prst="rect">
+            <a:avLst/>
+          </a:prstGeom>
+          <a:noFill/>
+        </p:spPr>
+        <p:txBody>
+          <a:bodyPr wrap="none">
+            <a:spAutoFit/>
+          </a:bodyPr>
+          <a:lstStyle/>
+          <a:p/>
+          <a:p>
+            <a:r>
+              <a:rPr sz="1400">
+                <a:solidFill>
+                  <a:srgbClr val="000000"/>
+                </a:solidFill>
+              </a:rPr>
+              <a:t>string s;
+getline(cin, s);
+for (char c : s) {
+    if (c == ' ') cout &lt;&lt; "%20";
+    else cout &lt;&lt; c;
+}</a:t>
+            </a:r>
+          </a:p>
+        </p:txBody>
+      </p:sp>
+    </p:spTree>
+  </p:cSld>
+  <p:clrMapOvr>
+    <a:masterClrMapping/>
+  </p:clrMapOvr>
+</p:sld>
+</file>
+
+<file path=ppt/slides/slide5.xml><?xml version="1.0" encoding="utf-8"?>
+<p:sld xmlns:a="http://schemas.openxmlformats.org/drawingml/2006/main" xmlns:p="http://schemas.openxmlformats.org/presentationml/2006/main" xmlns:r="http://schemas.openxmlformats.org/officeDocument/2006/relationships">
+  <p:cSld>
+    <p:spTree>
+      <p:nvGrpSpPr>
+        <p:cNvPr id="1" name=""/>
+        <p:cNvGrpSpPr/>
+        <p:nvPr/>
+      </p:nvGrpSpPr>
+      <p:grpSpPr/>
+      <p:sp>
+        <p:nvSpPr>
+          <p:cNvPr id="2" name="TextBox 1"/>
+          <p:cNvSpPr txBox="1"/>
+          <p:nvPr/>
+        </p:nvSpPr>
+        <p:spPr>
+          <a:xfrm>
+            <a:off x="914400" y="457200"/>
+            <a:ext cx="10058400" cy="914400"/>
+          </a:xfrm>
+          <a:prstGeom prst="rect">
+            <a:avLst/>
+          </a:prstGeom>
+          <a:noFill/>
+        </p:spPr>
+        <p:txBody>
+          <a:bodyPr wrap="none">
+            <a:spAutoFit/>
+          </a:bodyPr>
+          <a:lstStyle/>
+          <a:p>
+            <a:r>
+              <a:rPr sz="2800" b="1">
+                <a:solidFill>
+                  <a:srgbClr val="8B0000"/>
+                </a:solidFill>
+              </a:rPr>
+              <a:t>Python 代码示例</a:t>
+            </a:r>
+          </a:p>
+        </p:txBody>
+      </p:sp>
+      <p:sp>
+        <p:nvSpPr>
+          <p:cNvPr id="3" name="TextBox 2"/>
+          <p:cNvSpPr txBox="1"/>
+          <p:nvPr/>
+        </p:nvSpPr>
+        <p:spPr>
+          <a:xfrm>
+            <a:off x="914400" y="1371600"/>
+            <a:ext cx="10058400" cy="5029200"/>
+          </a:xfrm>
+          <a:prstGeom prst="rect">
+            <a:avLst/>
+          </a:prstGeom>
+          <a:noFill/>
+        </p:spPr>
+        <p:txBody>
+          <a:bodyPr wrap="none">
+            <a:spAutoFit/>
+          </a:bodyPr>
+          <a:lstStyle/>
+          <a:p/>
+          <a:p>
+            <a:r>
+              <a:rPr sz="1400">
+                <a:solidFill>
+                  <a:srgbClr val="000000"/>
+                </a:solidFill>
+              </a:rPr>
+              <a:t>s = input()
+print(s.replace(' ', '%20'))</a:t>
+            </a:r>
+          </a:p>
+        </p:txBody>
+      </p:sp>
+    </p:spTree>
+  </p:cSld>
+  <p:clrMapOvr>
+    <a:masterClrMapping/>
+  </p:clrMapOvr>
+</p:sld>
+</file>
+
+<file path=ppt/slides/slide6.xml><?xml version="1.0" encoding="utf-8"?>
+<p:sld xmlns:a="http://schemas.openxmlformats.org/drawingml/2006/main" xmlns:p="http://schemas.openxmlformats.org/presentationml/2006/main" xmlns:r="http://schemas.openxmlformats.org/officeDocument/2006/relationships">
+  <p:cSld>
+    <p:spTree>
+      <p:nvGrpSpPr>
+        <p:cNvPr id="1" name=""/>
+        <p:cNvGrpSpPr/>
+        <p:nvPr/>
+      </p:nvGrpSpPr>
+      <p:grpSpPr/>
+      <p:sp>
+        <p:nvSpPr>
+          <p:cNvPr id="2" name="TextBox 1"/>
+          <p:cNvSpPr txBox="1"/>
+          <p:nvPr/>
+        </p:nvSpPr>
+        <p:spPr>
+          <a:xfrm>
+            <a:off x="914400" y="457200"/>
+            <a:ext cx="10058400" cy="914400"/>
+          </a:xfrm>
+          <a:prstGeom prst="rect">
+            <a:avLst/>
+          </a:prstGeom>
+          <a:noFill/>
+        </p:spPr>
+        <p:txBody>
+          <a:bodyPr wrap="none">
+            <a:spAutoFit/>
+          </a:bodyPr>
+          <a:lstStyle/>
+          <a:p>
+            <a:r>
+              <a:rPr sz="2800" b="1">
+                <a:solidFill>
+                  <a:srgbClr val="8B0000"/>
+                </a:solidFill>
+              </a:rPr>
+              <a:t>常见错误</a:t>
+            </a:r>
+          </a:p>
+        </p:txBody>
+      </p:sp>
+      <p:sp>
+        <p:nvSpPr>
+          <p:cNvPr id="3" name="TextBox 2"/>
+          <p:cNvSpPr txBox="1"/>
+          <p:nvPr/>
+        </p:nvSpPr>
+        <p:spPr>
+          <a:xfrm>
+            <a:off x="914400" y="1371600"/>
+            <a:ext cx="10058400" cy="5029200"/>
+          </a:xfrm>
+          <a:prstGeom prst="rect">
+            <a:avLst/>
+          </a:prstGeom>
+          <a:noFill/>
+        </p:spPr>
+        <p:txBody>
+          <a:bodyPr wrap="none">
+            <a:spAutoFit/>
+          </a:bodyPr>
+          <a:lstStyle/>
+          <a:p/>
+          <a:p>
+            <a:r>
+              <a:rPr sz="1600">
+                <a:solidFill>
+                  <a:srgbClr val="000000"/>
+                </a:solidFill>
+              </a:rPr>
+              <a:t>C++的cin不读空格，用getline</a:t>
+            </a:r>
+          </a:p>
+          <a:p>
+            <a:r>
+              <a:rPr sz="1600">
+                <a:solidFill>
+                  <a:srgbClr val="000000"/>
+                </a:solidFill>
+              </a:rPr>
+              <a:t>Python字符串不可变，replace返回新字符串</a:t>
+            </a:r>
+          </a:p>
+          <a:p>
+            <a:r>
+              <a:rPr sz="1600">
+                <a:solidFill>
+                  <a:srgbClr val="000000"/>
+                </a:solidFill>
+              </a:rPr>
+              <a:t>忘记处理空字符串</a:t>
+            </a:r>
+          </a:p>
+          <a:p>
+            <a:r>
+              <a:rPr sz="1600">
+                <a:solidFill>
+                  <a:srgbClr val="000000"/>
+                </a:solidFill>
+              </a:rPr>
+              <a:t>编码问题：中文字符多字节</a:t>
+            </a:r>
+          </a:p>
+        </p:txBody>
+      </p:sp>
+    </p:spTree>
+  </p:cSld>
+  <p:clrMapOvr>
+    <a:masterClrMapping/>
+  </p:clrMapOvr>
+</p:sld>
+</file>
+
+<file path=ppt/slides/slide7.xml><?xml version="1.0" encoding="utf-8"?>
+<p:sld xmlns:a="http://schemas.openxmlformats.org/drawingml/2006/main" xmlns:p="http://schemas.openxmlformats.org/presentationml/2006/main" xmlns:r="http://schemas.openxmlformats.org/officeDocument/2006/relationships">
+  <p:cSld>
+    <p:spTree>
+      <p:nvGrpSpPr>
+        <p:cNvPr id="1" name=""/>
+        <p:cNvGrpSpPr/>
+        <p:nvPr/>
+      </p:nvGrpSpPr>
+      <p:grpSpPr/>
+      <p:sp>
+        <p:nvSpPr>
+          <p:cNvPr id="2" name="TextBox 1"/>
+          <p:cNvSpPr txBox="1"/>
+          <p:nvPr/>
+        </p:nvSpPr>
+        <p:spPr>
+          <a:xfrm>
+            <a:off x="914400" y="457200"/>
+            <a:ext cx="10058400" cy="914400"/>
+          </a:xfrm>
+          <a:prstGeom prst="rect">
+            <a:avLst/>
+          </a:prstGeom>
+          <a:noFill/>
+        </p:spPr>
+        <p:txBody>
+          <a:bodyPr wrap="none">
+            <a:spAutoFit/>
+          </a:bodyPr>
+          <a:lstStyle/>
+          <a:p>
+            <a:r>
+              <a:rPr sz="2800" b="1">
+                <a:solidFill>
+                  <a:srgbClr val="8B0000"/>
+                </a:solidFill>
+              </a:rPr>
+              <a:t>练习题目</a:t>
+            </a:r>
+          </a:p>
+        </p:txBody>
+      </p:sp>
+      <p:sp>
+        <p:nvSpPr>
+          <p:cNvPr id="3" name="TextBox 2"/>
+          <p:cNvSpPr txBox="1"/>
+          <p:nvPr/>
+        </p:nvSpPr>
+        <p:spPr>
+          <a:xfrm>
+            <a:off x="914400" y="1371600"/>
+            <a:ext cx="10058400" cy="5029200"/>
+          </a:xfrm>
+          <a:prstGeom prst="rect">
+            <a:avLst/>
+          </a:prstGeom>
+          <a:noFill/>
+        </p:spPr>
+        <p:txBody>
+          <a:bodyPr wrap="none">
+            <a:spAutoFit/>
+          </a:bodyPr>
+          <a:lstStyle/>
+          <a:p/>
+          <a:p>
+            <a:r>
+              <a:rPr sz="1600">
+                <a:solidFill>
+                  <a:srgbClr val="000000"/>
+                </a:solidFill>
+              </a:rPr>
+              <a:t>JD067 铁令长度</a:t>
+            </a:r>
+          </a:p>
+          <a:p>
+            <a:r>
+              <a:rPr sz="1600">
+                <a:solidFill>
+                  <a:srgbClr val="000000"/>
+                </a:solidFill>
+              </a:rPr>
+              <a:t>JD072 猜拳</a:t>
+            </a:r>
+          </a:p>
+          <a:p>
+            <a:r>
+              <a:rPr sz="1600">
+                <a:solidFill>
+                  <a:srgbClr val="000000"/>
+                </a:solidFill>
+              </a:rPr>
+              <a:t>JD078 密文匹配</a:t>
+            </a:r>
+          </a:p>
+        </p:txBody>
+      </p:sp>
+    </p:spTree>
+  </p:cSld>
+  <p:clrMapOvr>
+    <a:masterClrMapping/>
+  </p:clrMapOvr>
+</p:sld>
+</file>
+
+<file path=ppt/slides/slide8.xml><?xml version="1.0" encoding="utf-8"?>
+<p:sld xmlns:a="http://schemas.openxmlformats.org/drawingml/2006/main" xmlns:p="http://schemas.openxmlformats.org/presentationml/2006/main" xmlns:r="http://schemas.openxmlformats.org/officeDocument/2006/relationships">
+  <p:cSld>
+    <p:spTree>
+      <p:nvGrpSpPr>
+        <p:cNvPr id="1" name=""/>
+        <p:cNvGrpSpPr/>
+        <p:nvPr/>
+      </p:nvGrpSpPr>
+      <p:grpSpPr/>
+      <p:sp>
+        <p:nvSpPr>
+          <p:cNvPr id="2" name="TextBox 1"/>
+          <p:cNvSpPr txBox="1"/>
+          <p:nvPr/>
+        </p:nvSpPr>
+        <p:spPr>
+          <a:xfrm>
+            <a:off x="914400" y="457200"/>
+            <a:ext cx="10058400" cy="914400"/>
+          </a:xfrm>
+          <a:prstGeom prst="rect">
+            <a:avLst/>
+          </a:prstGeom>
+          <a:noFill/>
+        </p:spPr>
+        <p:txBody>
+          <a:bodyPr wrap="none">
+            <a:spAutoFit/>
+          </a:bodyPr>
+          <a:lstStyle/>
+          <a:p>
+            <a:r>
+              <a:rPr sz="2800" b="1">
+                <a:solidFill>
+                  <a:srgbClr val="8B0000"/>
+                </a:solidFill>
+              </a:rPr>
+              <a:t>本章小结</a:t>
+            </a:r>
+          </a:p>
+        </p:txBody>
+      </p:sp>
+      <p:sp>
+        <p:nvSpPr>
+          <p:cNvPr id="3" name="TextBox 2"/>
+          <p:cNvSpPr txBox="1"/>
+          <p:nvPr/>
+        </p:nvSpPr>
+        <p:spPr>
+          <a:xfrm>
+            <a:off x="914400" y="1371600"/>
+            <a:ext cx="10058400" cy="5029200"/>
+          </a:xfrm>
+          <a:prstGeom prst="rect">
+            <a:avLst/>
+          </a:prstGeom>
+          <a:noFill/>
+        </p:spPr>
+        <p:txBody>
+          <a:bodyPr wrap="none">
+            <a:spAutoFit/>
+          </a:bodyPr>
+          <a:lstStyle/>
+          <a:p/>
+          <a:p>
+            <a:r>
+              <a:rPr sz="1600">
+                <a:solidFill>
+                  <a:srgbClr val="000000"/>
+                </a:solidFill>
+              </a:rPr>
+              <a:t>掌握核心概念</a:t>
+            </a:r>
+          </a:p>
+          <a:p>
+            <a:r>
+              <a:rPr sz="1600">
+                <a:solidFill>
+                  <a:srgbClr val="000000"/>
+                </a:solidFill>
+              </a:rPr>
+              <a:t>多做练习</a:t>
+            </a:r>
+          </a:p>
+          <a:p>
+            <a:r>
+              <a:rPr sz="1600">
+                <a:solidFill>
+                  <a:srgbClr val="000000"/>
+                </a:solidFill>
+              </a:rPr>
+              <a:t>注意边界条件</a:t>
+            </a:r>
+          </a:p>
+          <a:p>
+            <a:r>
+              <a:rPr sz="1600">
+                <a:solidFill>
+                  <a:srgbClr val="000000"/>
+                </a:solidFill>
+              </a:rPr>
+              <a:t>理解算法思想而非死记代码</a:t>
             </a:r>
           </a:p>
         </p:txBody>

--- a/textbook/ppt/chapter06_ppt.pptx
+++ b/textbook/ppt/chapter06_ppt.pptx
@@ -12,7 +12,6 @@
     <p:sldId id="260" r:id="rId11"/>
     <p:sldId id="261" r:id="rId12"/>
     <p:sldId id="262" r:id="rId13"/>
-    <p:sldId id="263" r:id="rId14"/>
   </p:sldIdLst>
   <p:sldSz cx="12188952" cy="6858000" type="screen4x3"/>
   <p:notesSz cx="6858000" cy="9144000"/>
@@ -3124,18 +3123,7 @@
                   <a:srgbClr val="8B0000"/>
                 </a:solidFill>
               </a:rPr>
-              <a:t>第6章 古卷密文</a:t>
-            </a:r>
-          </a:p>
-          <a:p>
-            <a:pPr algn="ctr"/>
-            <a:r>
-              <a:rPr sz="2400">
-                <a:solidFill>
-                  <a:srgbClr val="6B5D4D"/>
-                </a:solidFill>
-              </a:rPr>
-              <a:t>字符串处理</a:t>
+              <a:t>第6章</a:t>
             </a:r>
           </a:p>
         </p:txBody>
@@ -3166,8 +3154,8 @@
         </p:nvSpPr>
         <p:spPr>
           <a:xfrm>
-            <a:off x="914400" y="457200"/>
-            <a:ext cx="10058400" cy="914400"/>
+            <a:off x="457200" y="274320"/>
+            <a:ext cx="10972800" cy="731520"/>
           </a:xfrm>
           <a:prstGeom prst="rect">
             <a:avLst/>
@@ -3181,7 +3169,7 @@
           <a:lstStyle/>
           <a:p>
             <a:r>
-              <a:rPr sz="2800" b="1">
+              <a:rPr sz="2400" b="1">
                 <a:solidFill>
                   <a:srgbClr val="8B0000"/>
                 </a:solidFill>
@@ -3199,8 +3187,8 @@
         </p:nvSpPr>
         <p:spPr>
           <a:xfrm>
-            <a:off x="914400" y="1371600"/>
-            <a:ext cx="10058400" cy="4572000"/>
+            <a:off x="457200" y="1097280"/>
+            <a:ext cx="10972800" cy="5029200"/>
           </a:xfrm>
           <a:prstGeom prst="rect">
             <a:avLst/>
@@ -3215,26 +3203,42 @@
           <a:p/>
           <a:p>
             <a:r>
-              <a:rPr sz="1800"/>
-              <a:t>• 字符串长度与遍历的基本概念与应用</a:t>
-            </a:r>
-          </a:p>
-          <a:p>
-            <a:r>
-              <a:rPr sz="1800"/>
-              <a:t>• 查找与替换的基本概念与应用</a:t>
-            </a:r>
-          </a:p>
-          <a:p>
-            <a:r>
-              <a:rPr sz="1800"/>
-              <a:t>• 分割与拼接的基本概念与应用</a:t>
-            </a:r>
-          </a:p>
-          <a:p>
-            <a:r>
-              <a:rPr sz="1800"/>
-              <a:t>• ASCII码操作的基本概念与应用</a:t>
+              <a:rPr sz="1400">
+                <a:solidFill>
+                  <a:srgbClr val="000000"/>
+                </a:solidFill>
+              </a:rPr>
+              <a:t>字符串 = 字符序列（C++用string，Python用str）</a:t>
+            </a:r>
+          </a:p>
+          <a:p>
+            <a:r>
+              <a:rPr sz="1400">
+                <a:solidFill>
+                  <a:srgbClr val="000000"/>
+                </a:solidFill>
+              </a:rPr>
+              <a:t>遍历：for(char c : s) 或 for c in s</a:t>
+            </a:r>
+          </a:p>
+          <a:p>
+            <a:r>
+              <a:rPr sz="1400">
+                <a:solidFill>
+                  <a:srgbClr val="000000"/>
+                </a:solidFill>
+              </a:rPr>
+              <a:t>查找替换：find/replace（C++），in/replace（Python）</a:t>
+            </a:r>
+          </a:p>
+          <a:p>
+            <a:r>
+              <a:rPr sz="1400">
+                <a:solidFill>
+                  <a:srgbClr val="000000"/>
+                </a:solidFill>
+              </a:rPr>
+              <a:t>分割拼接：split/join（Python最方便）</a:t>
             </a:r>
           </a:p>
         </p:txBody>
@@ -3265,8 +3269,8 @@
         </p:nvSpPr>
         <p:spPr>
           <a:xfrm>
-            <a:off x="914400" y="457200"/>
-            <a:ext cx="10058400" cy="914400"/>
+            <a:off x="457200" y="274320"/>
+            <a:ext cx="10972800" cy="731520"/>
           </a:xfrm>
           <a:prstGeom prst="rect">
             <a:avLst/>
@@ -3280,12 +3284,12 @@
           <a:lstStyle/>
           <a:p>
             <a:r>
-              <a:rPr sz="2800" b="1">
+              <a:rPr sz="2400" b="1">
                 <a:solidFill>
                   <a:srgbClr val="8B0000"/>
                 </a:solidFill>
               </a:rPr>
-              <a:t>本章概览</a:t>
+              <a:t>C++ 代码示例</a:t>
             </a:r>
           </a:p>
         </p:txBody>
@@ -3298,8 +3302,8 @@
         </p:nvSpPr>
         <p:spPr>
           <a:xfrm>
-            <a:off x="914400" y="1371600"/>
-            <a:ext cx="10058400" cy="5029200"/>
+            <a:off x="457200" y="1097280"/>
+            <a:ext cx="10972800" cy="5029200"/>
           </a:xfrm>
           <a:prstGeom prst="rect">
             <a:avLst/>
@@ -3314,42 +3318,18 @@
           <a:p/>
           <a:p>
             <a:r>
-              <a:rPr sz="1600">
+              <a:rPr sz="1200">
                 <a:solidFill>
                   <a:srgbClr val="000000"/>
                 </a:solidFill>
               </a:rPr>
-              <a:t>字符串 = 字符数组（C++）/ 不可变对象（Python）</a:t>
-            </a:r>
-          </a:p>
-          <a:p>
-            <a:r>
-              <a:rPr sz="1600">
-                <a:solidFill>
-                  <a:srgbClr val="000000"/>
-                </a:solidFill>
-              </a:rPr>
-              <a:t>遍历：for(char c : s) 或 for c in s</a:t>
-            </a:r>
-          </a:p>
-          <a:p>
-            <a:r>
-              <a:rPr sz="1600">
-                <a:solidFill>
-                  <a:srgbClr val="000000"/>
-                </a:solidFill>
-              </a:rPr>
-              <a:t>查找替换：find/replace（C++）, in/replace（Python）</a:t>
-            </a:r>
-          </a:p>
-          <a:p>
-            <a:r>
-              <a:rPr sz="1600">
-                <a:solidFill>
-                  <a:srgbClr val="000000"/>
-                </a:solidFill>
-              </a:rPr>
-              <a:t>分割拼接：split/join</a:t>
+              <a:t>string s;
+getline(cin, s);  // 读整行含空格
+for (char c : s) {
+    if (c == ' ') cout &lt;&lt; "%20";
+    else cout &lt;&lt; c;
+}
+cout &lt;&lt; endl;</a:t>
             </a:r>
           </a:p>
         </p:txBody>
@@ -3380,8 +3360,8 @@
         </p:nvSpPr>
         <p:spPr>
           <a:xfrm>
-            <a:off x="914400" y="457200"/>
-            <a:ext cx="10058400" cy="914400"/>
+            <a:off x="457200" y="274320"/>
+            <a:ext cx="10972800" cy="731520"/>
           </a:xfrm>
           <a:prstGeom prst="rect">
             <a:avLst/>
@@ -3395,12 +3375,12 @@
           <a:lstStyle/>
           <a:p>
             <a:r>
-              <a:rPr sz="2800" b="1">
+              <a:rPr sz="2400" b="1">
                 <a:solidFill>
                   <a:srgbClr val="8B0000"/>
                 </a:solidFill>
               </a:rPr>
-              <a:t>C++ 代码示例</a:t>
+              <a:t>Python 代码示例</a:t>
             </a:r>
           </a:p>
         </p:txBody>
@@ -3413,8 +3393,8 @@
         </p:nvSpPr>
         <p:spPr>
           <a:xfrm>
-            <a:off x="914400" y="1371600"/>
-            <a:ext cx="10058400" cy="5029200"/>
+            <a:off x="457200" y="1097280"/>
+            <a:ext cx="10972800" cy="5029200"/>
           </a:xfrm>
           <a:prstGeom prst="rect">
             <a:avLst/>
@@ -3429,17 +3409,13 @@
           <a:p/>
           <a:p>
             <a:r>
-              <a:rPr sz="1400">
+              <a:rPr sz="1200">
                 <a:solidFill>
                   <a:srgbClr val="000000"/>
                 </a:solidFill>
               </a:rPr>
-              <a:t>string s;
-getline(cin, s);
-for (char c : s) {
-    if (c == ' ') cout &lt;&lt; "%20";
-    else cout &lt;&lt; c;
-}</a:t>
+              <a:t>s = input()
+print(s.replace(' ', '%20'))</a:t>
             </a:r>
           </a:p>
         </p:txBody>
@@ -3470,8 +3446,8 @@
         </p:nvSpPr>
         <p:spPr>
           <a:xfrm>
-            <a:off x="914400" y="457200"/>
-            <a:ext cx="10058400" cy="914400"/>
+            <a:off x="457200" y="274320"/>
+            <a:ext cx="10972800" cy="731520"/>
           </a:xfrm>
           <a:prstGeom prst="rect">
             <a:avLst/>
@@ -3485,12 +3461,12 @@
           <a:lstStyle/>
           <a:p>
             <a:r>
-              <a:rPr sz="2800" b="1">
+              <a:rPr sz="2400" b="1">
                 <a:solidFill>
                   <a:srgbClr val="8B0000"/>
                 </a:solidFill>
               </a:rPr>
-              <a:t>Python 代码示例</a:t>
+              <a:t>常见错误</a:t>
             </a:r>
           </a:p>
         </p:txBody>
@@ -3503,8 +3479,8 @@
         </p:nvSpPr>
         <p:spPr>
           <a:xfrm>
-            <a:off x="914400" y="1371600"/>
-            <a:ext cx="10058400" cy="5029200"/>
+            <a:off x="457200" y="1097280"/>
+            <a:ext cx="10972800" cy="5029200"/>
           </a:xfrm>
           <a:prstGeom prst="rect">
             <a:avLst/>
@@ -3524,8 +3500,37 @@
                   <a:srgbClr val="000000"/>
                 </a:solidFill>
               </a:rPr>
-              <a:t>s = input()
-print(s.replace(' ', '%20'))</a:t>
+              <a:t>cin &gt;&gt; s 不读空格，getline(cin, s) 才读整行</a:t>
+            </a:r>
+          </a:p>
+          <a:p>
+            <a:r>
+              <a:rPr sz="1400">
+                <a:solidFill>
+                  <a:srgbClr val="000000"/>
+                </a:solidFill>
+              </a:rPr>
+              <a:t>Python字符串不可变，replace()返回新字符串</a:t>
+            </a:r>
+          </a:p>
+          <a:p>
+            <a:r>
+              <a:rPr sz="1400">
+                <a:solidFill>
+                  <a:srgbClr val="000000"/>
+                </a:solidFill>
+              </a:rPr>
+              <a:t>忘记处理空字符串</a:t>
+            </a:r>
+          </a:p>
+          <a:p>
+            <a:r>
+              <a:rPr sz="1400">
+                <a:solidFill>
+                  <a:srgbClr val="000000"/>
+                </a:solidFill>
+              </a:rPr>
+              <a:t>中文字符多字节，逐字符遍历要注意编码</a:t>
             </a:r>
           </a:p>
         </p:txBody>
@@ -3556,8 +3561,8 @@
         </p:nvSpPr>
         <p:spPr>
           <a:xfrm>
-            <a:off x="914400" y="457200"/>
-            <a:ext cx="10058400" cy="914400"/>
+            <a:off x="457200" y="274320"/>
+            <a:ext cx="10972800" cy="731520"/>
           </a:xfrm>
           <a:prstGeom prst="rect">
             <a:avLst/>
@@ -3571,12 +3576,12 @@
           <a:lstStyle/>
           <a:p>
             <a:r>
-              <a:rPr sz="2800" b="1">
+              <a:rPr sz="2400" b="1">
                 <a:solidFill>
                   <a:srgbClr val="8B0000"/>
                 </a:solidFill>
               </a:rPr>
-              <a:t>常见错误</a:t>
+              <a:t>练习题目</a:t>
             </a:r>
           </a:p>
         </p:txBody>
@@ -3589,8 +3594,8 @@
         </p:nvSpPr>
         <p:spPr>
           <a:xfrm>
-            <a:off x="914400" y="1371600"/>
-            <a:ext cx="10058400" cy="5029200"/>
+            <a:off x="457200" y="1097280"/>
+            <a:ext cx="10972800" cy="5029200"/>
           </a:xfrm>
           <a:prstGeom prst="rect">
             <a:avLst/>
@@ -3605,42 +3610,32 @@
           <a:p/>
           <a:p>
             <a:r>
-              <a:rPr sz="1600">
+              <a:rPr sz="1400">
                 <a:solidFill>
                   <a:srgbClr val="000000"/>
                 </a:solidFill>
               </a:rPr>
-              <a:t>C++的cin不读空格，用getline</a:t>
-            </a:r>
-          </a:p>
-          <a:p>
-            <a:r>
-              <a:rPr sz="1600">
+              <a:t>JD067 铁令长度 - 字符串长度 (Easy)</a:t>
+            </a:r>
+          </a:p>
+          <a:p>
+            <a:r>
+              <a:rPr sz="1400">
                 <a:solidFill>
                   <a:srgbClr val="000000"/>
                 </a:solidFill>
               </a:rPr>
-              <a:t>Python字符串不可变，replace返回新字符串</a:t>
-            </a:r>
-          </a:p>
-          <a:p>
-            <a:r>
-              <a:rPr sz="1600">
+              <a:t>JD072 猜拳 - 字符串匹配 (Medium)</a:t>
+            </a:r>
+          </a:p>
+          <a:p>
+            <a:r>
+              <a:rPr sz="1400">
                 <a:solidFill>
                   <a:srgbClr val="000000"/>
                 </a:solidFill>
               </a:rPr>
-              <a:t>忘记处理空字符串</a:t>
-            </a:r>
-          </a:p>
-          <a:p>
-            <a:r>
-              <a:rPr sz="1600">
-                <a:solidFill>
-                  <a:srgbClr val="000000"/>
-                </a:solidFill>
-              </a:rPr>
-              <a:t>编码问题：中文字符多字节</a:t>
+              <a:t>JD078 密文匹配 - 子串查找 (Hard)</a:t>
             </a:r>
           </a:p>
         </p:txBody>
@@ -3671,8 +3666,8 @@
         </p:nvSpPr>
         <p:spPr>
           <a:xfrm>
-            <a:off x="914400" y="457200"/>
-            <a:ext cx="10058400" cy="914400"/>
+            <a:off x="457200" y="274320"/>
+            <a:ext cx="10972800" cy="731520"/>
           </a:xfrm>
           <a:prstGeom prst="rect">
             <a:avLst/>
@@ -3686,12 +3681,12 @@
           <a:lstStyle/>
           <a:p>
             <a:r>
-              <a:rPr sz="2800" b="1">
+              <a:rPr sz="2400" b="1">
                 <a:solidFill>
                   <a:srgbClr val="8B0000"/>
                 </a:solidFill>
               </a:rPr>
-              <a:t>练习题目</a:t>
+              <a:t>本章小结</a:t>
             </a:r>
           </a:p>
         </p:txBody>
@@ -3704,8 +3699,8 @@
         </p:nvSpPr>
         <p:spPr>
           <a:xfrm>
-            <a:off x="914400" y="1371600"/>
-            <a:ext cx="10058400" cy="5029200"/>
+            <a:off x="457200" y="1097280"/>
+            <a:ext cx="10972800" cy="5029200"/>
           </a:xfrm>
           <a:prstGeom prst="rect">
             <a:avLst/>
@@ -3720,147 +3715,42 @@
           <a:p/>
           <a:p>
             <a:r>
-              <a:rPr sz="1600">
+              <a:rPr sz="1400">
                 <a:solidFill>
                   <a:srgbClr val="000000"/>
                 </a:solidFill>
               </a:rPr>
-              <a:t>JD067 铁令长度</a:t>
-            </a:r>
-          </a:p>
-          <a:p>
-            <a:r>
-              <a:rPr sz="1600">
+              <a:t>本章学习了第6章的核心概念</a:t>
+            </a:r>
+          </a:p>
+          <a:p>
+            <a:r>
+              <a:rPr sz="1400">
                 <a:solidFill>
                   <a:srgbClr val="000000"/>
                 </a:solidFill>
               </a:rPr>
-              <a:t>JD072 猜拳</a:t>
-            </a:r>
-          </a:p>
-          <a:p>
-            <a:r>
-              <a:rPr sz="1600">
+              <a:t>多做练习是掌握算法的关键</a:t>
+            </a:r>
+          </a:p>
+          <a:p>
+            <a:r>
+              <a:rPr sz="1400">
                 <a:solidFill>
                   <a:srgbClr val="000000"/>
                 </a:solidFill>
               </a:rPr>
-              <a:t>JD078 密文匹配</a:t>
-            </a:r>
-          </a:p>
-        </p:txBody>
-      </p:sp>
-    </p:spTree>
-  </p:cSld>
-  <p:clrMapOvr>
-    <a:masterClrMapping/>
-  </p:clrMapOvr>
-</p:sld>
-</file>
-
-<file path=ppt/slides/slide8.xml><?xml version="1.0" encoding="utf-8"?>
-<p:sld xmlns:a="http://schemas.openxmlformats.org/drawingml/2006/main" xmlns:p="http://schemas.openxmlformats.org/presentationml/2006/main" xmlns:r="http://schemas.openxmlformats.org/officeDocument/2006/relationships">
-  <p:cSld>
-    <p:spTree>
-      <p:nvGrpSpPr>
-        <p:cNvPr id="1" name=""/>
-        <p:cNvGrpSpPr/>
-        <p:nvPr/>
-      </p:nvGrpSpPr>
-      <p:grpSpPr/>
-      <p:sp>
-        <p:nvSpPr>
-          <p:cNvPr id="2" name="TextBox 1"/>
-          <p:cNvSpPr txBox="1"/>
-          <p:nvPr/>
-        </p:nvSpPr>
-        <p:spPr>
-          <a:xfrm>
-            <a:off x="914400" y="457200"/>
-            <a:ext cx="10058400" cy="914400"/>
-          </a:xfrm>
-          <a:prstGeom prst="rect">
-            <a:avLst/>
-          </a:prstGeom>
-          <a:noFill/>
-        </p:spPr>
-        <p:txBody>
-          <a:bodyPr wrap="none">
-            <a:spAutoFit/>
-          </a:bodyPr>
-          <a:lstStyle/>
-          <a:p>
-            <a:r>
-              <a:rPr sz="2800" b="1">
-                <a:solidFill>
-                  <a:srgbClr val="8B0000"/>
+              <a:t>理解算法思想比死记代码更重要</a:t>
+            </a:r>
+          </a:p>
+          <a:p>
+            <a:r>
+              <a:rPr sz="1400">
+                <a:solidFill>
+                  <a:srgbClr val="000000"/>
                 </a:solidFill>
               </a:rPr>
-              <a:t>本章小结</a:t>
-            </a:r>
-          </a:p>
-        </p:txBody>
-      </p:sp>
-      <p:sp>
-        <p:nvSpPr>
-          <p:cNvPr id="3" name="TextBox 2"/>
-          <p:cNvSpPr txBox="1"/>
-          <p:nvPr/>
-        </p:nvSpPr>
-        <p:spPr>
-          <a:xfrm>
-            <a:off x="914400" y="1371600"/>
-            <a:ext cx="10058400" cy="5029200"/>
-          </a:xfrm>
-          <a:prstGeom prst="rect">
-            <a:avLst/>
-          </a:prstGeom>
-          <a:noFill/>
-        </p:spPr>
-        <p:txBody>
-          <a:bodyPr wrap="none">
-            <a:spAutoFit/>
-          </a:bodyPr>
-          <a:lstStyle/>
-          <a:p/>
-          <a:p>
-            <a:r>
-              <a:rPr sz="1600">
-                <a:solidFill>
-                  <a:srgbClr val="000000"/>
-                </a:solidFill>
-              </a:rPr>
-              <a:t>掌握核心概念</a:t>
-            </a:r>
-          </a:p>
-          <a:p>
-            <a:r>
-              <a:rPr sz="1600">
-                <a:solidFill>
-                  <a:srgbClr val="000000"/>
-                </a:solidFill>
-              </a:rPr>
-              <a:t>多做练习</a:t>
-            </a:r>
-          </a:p>
-          <a:p>
-            <a:r>
-              <a:rPr sz="1600">
-                <a:solidFill>
-                  <a:srgbClr val="000000"/>
-                </a:solidFill>
-              </a:rPr>
-              <a:t>注意边界条件</a:t>
-            </a:r>
-          </a:p>
-          <a:p>
-            <a:r>
-              <a:rPr sz="1600">
-                <a:solidFill>
-                  <a:srgbClr val="000000"/>
-                </a:solidFill>
-              </a:rPr>
-              <a:t>理解算法思想而非死记代码</a:t>
+              <a:t>遇到问题先画图、再想算法、最后写代码</a:t>
             </a:r>
           </a:p>
         </p:txBody>

--- a/textbook/ppt/chapter06_ppt.pptx
+++ b/textbook/ppt/chapter06_ppt.pptx
@@ -12,6 +12,7 @@
     <p:sldId id="260" r:id="rId11"/>
     <p:sldId id="261" r:id="rId12"/>
     <p:sldId id="262" r:id="rId13"/>
+    <p:sldId id="263" r:id="rId14"/>
   </p:sldIdLst>
   <p:sldSz cx="12188952" cy="6858000" type="screen4x3"/>
   <p:notesSz cx="6858000" cy="9144000"/>
@@ -3615,7 +3616,7 @@
                   <a:srgbClr val="000000"/>
                 </a:solidFill>
               </a:rPr>
-              <a:t>JD067 铁令长度 - 字符串长度 (Easy)</a:t>
+              <a:t>JD067 古卷测长 - 字符串长度 (Easy)</a:t>
             </a:r>
           </a:p>
           <a:p>
@@ -3625,7 +3626,7 @@
                   <a:srgbClr val="000000"/>
                 </a:solidFill>
               </a:rPr>
-              <a:t>JD072 猜拳 - 字符串匹配 (Medium)</a:t>
+              <a:t>JD072 拳掌对决 - 字符串匹配 (Medium)</a:t>
             </a:r>
           </a:p>
           <a:p>
@@ -3635,7 +3636,7 @@
                   <a:srgbClr val="000000"/>
                 </a:solidFill>
               </a:rPr>
-              <a:t>JD078 密文匹配 - 子串查找 (Hard)</a:t>
+              <a:t>JD078 两卷对校 - 子串查找 (Hard)</a:t>
             </a:r>
           </a:p>
         </p:txBody>
@@ -3751,6 +3752,91 @@
                 </a:solidFill>
               </a:rPr>
               <a:t>遇到问题先画图、再想算法、最后写代码</a:t>
+            </a:r>
+          </a:p>
+        </p:txBody>
+      </p:sp>
+    </p:spTree>
+  </p:cSld>
+  <p:clrMapOvr>
+    <a:masterClrMapping/>
+  </p:clrMapOvr>
+</p:sld>
+</file>
+
+<file path=ppt/slides/slide8.xml><?xml version="1.0" encoding="utf-8"?>
+<p:sld xmlns:a="http://schemas.openxmlformats.org/drawingml/2006/main" xmlns:p="http://schemas.openxmlformats.org/presentationml/2006/main" xmlns:r="http://schemas.openxmlformats.org/officeDocument/2006/relationships">
+  <p:cSld>
+    <p:spTree>
+      <p:nvGrpSpPr>
+        <p:cNvPr id="1" name=""/>
+        <p:cNvGrpSpPr/>
+        <p:nvPr/>
+      </p:nvGrpSpPr>
+      <p:grpSpPr/>
+      <p:sp>
+        <p:nvSpPr>
+          <p:cNvPr id="2" name="TextBox 1"/>
+          <p:cNvSpPr txBox="1"/>
+          <p:nvPr/>
+        </p:nvSpPr>
+        <p:spPr>
+          <a:xfrm>
+            <a:off x="457200" y="274320"/>
+            <a:ext cx="10972800" cy="731520"/>
+          </a:xfrm>
+          <a:prstGeom prst="rect">
+            <a:avLst/>
+          </a:prstGeom>
+          <a:noFill/>
+        </p:spPr>
+        <p:txBody>
+          <a:bodyPr wrap="none">
+            <a:spAutoFit/>
+          </a:bodyPr>
+          <a:lstStyle/>
+          <a:p>
+            <a:r>
+              <a:rPr sz="2400" b="1">
+                <a:solidFill>
+                  <a:srgbClr val="8B0000"/>
+                </a:solidFill>
+              </a:rPr>
+              <a:t>本章概览</a:t>
+            </a:r>
+          </a:p>
+        </p:txBody>
+      </p:sp>
+      <p:sp>
+        <p:nvSpPr>
+          <p:cNvPr id="3" name="TextBox 2"/>
+          <p:cNvSpPr txBox="1"/>
+          <p:nvPr/>
+        </p:nvSpPr>
+        <p:spPr>
+          <a:xfrm>
+            <a:off x="457200" y="1097280"/>
+            <a:ext cx="10972800" cy="5029200"/>
+          </a:xfrm>
+          <a:prstGeom prst="rect">
+            <a:avLst/>
+          </a:prstGeom>
+          <a:noFill/>
+        </p:spPr>
+        <p:txBody>
+          <a:bodyPr wrap="none">
+            <a:spAutoFit/>
+          </a:bodyPr>
+          <a:lstStyle/>
+          <a:p/>
+          <a:p>
+            <a:r>
+              <a:rPr sz="1600">
+                <a:solidFill>
+                  <a:srgbClr val="000000"/>
+                </a:solidFill>
+              </a:rPr>
+              <a:t>本章学习字符串处理——文本数据的查找、替换、分割等操作。</a:t>
             </a:r>
           </a:p>
         </p:txBody>

--- a/textbook/ppt/chapter06_ppt.pptx
+++ b/textbook/ppt/chapter06_ppt.pptx
@@ -13,6 +13,7 @@
     <p:sldId id="261" r:id="rId12"/>
     <p:sldId id="262" r:id="rId13"/>
     <p:sldId id="263" r:id="rId14"/>
+    <p:sldId id="264" r:id="rId15"/>
   </p:sldIdLst>
   <p:sldSz cx="12188952" cy="6858000" type="screen4x3"/>
   <p:notesSz cx="6858000" cy="9144000"/>
@@ -3721,7 +3722,7 @@
                   <a:srgbClr val="000000"/>
                 </a:solidFill>
               </a:rPr>
-              <a:t>本章学习了第6章的核心概念</a:t>
+              <a:t/>
             </a:r>
           </a:p>
           <a:p>
@@ -3731,7 +3732,7 @@
                   <a:srgbClr val="000000"/>
                 </a:solidFill>
               </a:rPr>
-              <a:t>多做练习是掌握算法的关键</a:t>
+              <a:t/>
             </a:r>
           </a:p>
           <a:p>
@@ -3741,7 +3742,7 @@
                   <a:srgbClr val="000000"/>
                 </a:solidFill>
               </a:rPr>
-              <a:t>理解算法思想比死记代码更重要</a:t>
+              <a:t/>
             </a:r>
           </a:p>
           <a:p>
@@ -3751,7 +3752,7 @@
                   <a:srgbClr val="000000"/>
                 </a:solidFill>
               </a:rPr>
-              <a:t>遇到问题先画图、再想算法、最后写代码</a:t>
+              <a:t/>
             </a:r>
           </a:p>
         </p:txBody>
@@ -3837,6 +3838,121 @@
                 </a:solidFill>
               </a:rPr>
               <a:t>本章学习字符串处理——文本数据的查找、替换、分割等操作。</a:t>
+            </a:r>
+          </a:p>
+        </p:txBody>
+      </p:sp>
+    </p:spTree>
+  </p:cSld>
+  <p:clrMapOvr>
+    <a:masterClrMapping/>
+  </p:clrMapOvr>
+</p:sld>
+</file>
+
+<file path=ppt/slides/slide9.xml><?xml version="1.0" encoding="utf-8"?>
+<p:sld xmlns:a="http://schemas.openxmlformats.org/drawingml/2006/main" xmlns:p="http://schemas.openxmlformats.org/presentationml/2006/main" xmlns:r="http://schemas.openxmlformats.org/officeDocument/2006/relationships">
+  <p:cSld>
+    <p:spTree>
+      <p:nvGrpSpPr>
+        <p:cNvPr id="1" name=""/>
+        <p:cNvGrpSpPr/>
+        <p:nvPr/>
+      </p:nvGrpSpPr>
+      <p:grpSpPr/>
+      <p:sp>
+        <p:nvSpPr>
+          <p:cNvPr id="2" name="TextBox 1"/>
+          <p:cNvSpPr txBox="1"/>
+          <p:nvPr/>
+        </p:nvSpPr>
+        <p:spPr>
+          <a:xfrm>
+            <a:off x="457200" y="274320"/>
+            <a:ext cx="10972800" cy="731520"/>
+          </a:xfrm>
+          <a:prstGeom prst="rect">
+            <a:avLst/>
+          </a:prstGeom>
+          <a:noFill/>
+        </p:spPr>
+        <p:txBody>
+          <a:bodyPr wrap="none">
+            <a:spAutoFit/>
+          </a:bodyPr>
+          <a:lstStyle/>
+          <a:p>
+            <a:r>
+              <a:rPr sz="2400" b="1">
+                <a:solidFill>
+                  <a:srgbClr val="8B0000"/>
+                </a:solidFill>
+              </a:rPr>
+              <a:t>第6章 核心要点</a:t>
+            </a:r>
+          </a:p>
+        </p:txBody>
+      </p:sp>
+      <p:sp>
+        <p:nvSpPr>
+          <p:cNvPr id="3" name="TextBox 2"/>
+          <p:cNvSpPr txBox="1"/>
+          <p:nvPr/>
+        </p:nvSpPr>
+        <p:spPr>
+          <a:xfrm>
+            <a:off x="457200" y="1097280"/>
+            <a:ext cx="10972800" cy="5029200"/>
+          </a:xfrm>
+          <a:prstGeom prst="rect">
+            <a:avLst/>
+          </a:prstGeom>
+          <a:noFill/>
+        </p:spPr>
+        <p:txBody>
+          <a:bodyPr wrap="none">
+            <a:spAutoFit/>
+          </a:bodyPr>
+          <a:lstStyle/>
+          <a:p/>
+          <a:p>
+            <a:r>
+              <a:rPr sz="1600">
+                <a:solidFill>
+                  <a:srgbClr val="000000"/>
+                </a:solidFill>
+              </a:rPr>
+              <a:t>• 字符串的长度、查找、替换</a:t>
+            </a:r>
+          </a:p>
+          <a:p>
+            <a:r>
+              <a:rPr sz="1600">
+                <a:solidFill>
+                  <a:srgbClr val="000000"/>
+                </a:solidFill>
+              </a:rPr>
+              <a:t>• getline 读取含空格的整行</a:t>
+            </a:r>
+          </a:p>
+          <a:p>
+            <a:r>
+              <a:rPr sz="1600">
+                <a:solidFill>
+                  <a:srgbClr val="000000"/>
+                </a:solidFill>
+              </a:rPr>
+              <a:t>• split/join 分割拼接</a:t>
+            </a:r>
+          </a:p>
+          <a:p>
+            <a:r>
+              <a:rPr sz="1600">
+                <a:solidFill>
+                  <a:srgbClr val="000000"/>
+                </a:solidFill>
+              </a:rPr>
+              <a:t>• ASCII 码与字符转换</a:t>
             </a:r>
           </a:p>
         </p:txBody>
